--- a/Specifications/middle-ear-muscle-reflex/GUI-Screens.pptx
+++ b/Specifications/middle-ear-muscle-reflex/GUI-Screens.pptx
@@ -112,6 +112,63 @@
     </p:ext>
   </p:extLst>
 </p:presentation>
+</file>
+
+<file path=ppt/authors.xml><?xml version="1.0" encoding="utf-8"?>
+<p188:authorLst xmlns:a="http://schemas.openxmlformats.org/drawingml/2006/main" xmlns:r="http://schemas.openxmlformats.org/officeDocument/2006/relationships" xmlns:p188="http://schemas.microsoft.com/office/powerpoint/2018/8/main">
+  <p188:author id="{88F12675-B476-9C9C-3DDC-B9414340EA78}" name="Brian Graybill" initials="BG" userId="S::BGraybill@creare.com::dc391d0a-f6da-4b26-b919-bb1c044bef8d" providerId="AD"/>
+</p188:authorLst>
+</file>
+
+<file path=ppt/comments/modernComment_105_B1C5B056.xml><?xml version="1.0" encoding="utf-8"?>
+<p188:cmLst xmlns:a="http://schemas.openxmlformats.org/drawingml/2006/main" xmlns:r="http://schemas.openxmlformats.org/officeDocument/2006/relationships" xmlns:p188="http://schemas.microsoft.com/office/powerpoint/2018/8/main">
+  <p188:cm id="{3C806639-315B-4B31-9216-2810E251B41B}" authorId="{88F12675-B476-9C9C-3DDC-B9414340EA78}" created="2025-07-03T20:03:05.060">
+    <ac:txMkLst xmlns:ac="http://schemas.microsoft.com/office/drawing/2013/main/command">
+      <pc:docMk xmlns:pc="http://schemas.microsoft.com/office/powerpoint/2013/main/command"/>
+      <pc:sldMk xmlns:pc="http://schemas.microsoft.com/office/powerpoint/2013/main/command" cId="2982522966" sldId="261"/>
+      <ac:graphicFrameMk id="13" creationId="{4E131278-6C5F-ED5D-98F4-03D3B47CD2E3}"/>
+      <ac:tblMk/>
+      <ac:tcMk rowId="3630156756" colId="3965875387"/>
+      <ac:txMk cp="0" len="15">
+        <ac:context len="16" hash="1313032961"/>
+      </ac:txMk>
+    </ac:txMkLst>
+    <p188:pos x="3827352" y="568476"/>
+    <p188:txBody>
+      <a:bodyPr/>
+      <a:lstStyle/>
+      <a:p>
+        <a:r>
+          <a:rPr lang="en-US"/>
+          <a:t>Ask Vero/Blaine/Sam about this</a:t>
+        </a:r>
+      </a:p>
+    </p188:txBody>
+  </p188:cm>
+  <p188:cm id="{2E8008AD-E049-463C-83ED-80FA3C36DB52}" authorId="{88F12675-B476-9C9C-3DDC-B9414340EA78}" created="2025-07-03T20:33:20.389">
+    <ac:txMkLst xmlns:ac="http://schemas.microsoft.com/office/drawing/2013/main/command">
+      <pc:docMk xmlns:pc="http://schemas.microsoft.com/office/powerpoint/2013/main/command"/>
+      <pc:sldMk xmlns:pc="http://schemas.microsoft.com/office/powerpoint/2013/main/command" cId="2982522966" sldId="261"/>
+      <ac:graphicFrameMk id="13" creationId="{4E131278-6C5F-ED5D-98F4-03D3B47CD2E3}"/>
+      <ac:tblMk/>
+      <ac:tcMk rowId="303658143" colId="3965875387"/>
+      <ac:txMk cp="0" len="16">
+        <ac:context len="17" hash="2253450140"/>
+      </ac:txMk>
+    </ac:txMkLst>
+    <p188:pos x="3913077" y="1178076"/>
+    <p188:txBody>
+      <a:bodyPr/>
+      <a:lstStyle/>
+      <a:p>
+        <a:r>
+          <a:rPr lang="en-US"/>
+          <a:t>Is this the correct value?</a:t>
+        </a:r>
+      </a:p>
+    </p188:txBody>
+  </p188:cm>
+</p188:cmLst>
 </file>
 
 <file path=ppt/slideLayouts/slideLayout1.xml><?xml version="1.0" encoding="utf-8"?>
@@ -3449,7 +3506,7 @@
               <p:nvPr/>
             </p:nvPicPr>
             <p:blipFill>
-              <a:blip r:embed="rId2"/>
+              <a:blip r:embed="rId3"/>
               <a:srcRect l="23569" t="12201" r="25360" b="18743"/>
               <a:stretch/>
             </p:blipFill>
@@ -3478,7 +3535,7 @@
               <p:nvPr/>
             </p:nvPicPr>
             <p:blipFill>
-              <a:blip r:embed="rId3"/>
+              <a:blip r:embed="rId4"/>
               <a:srcRect l="54980" t="72026" r="39565" b="21315"/>
               <a:stretch/>
             </p:blipFill>
@@ -3510,7 +3567,7 @@
               <p:nvPr/>
             </p:nvPicPr>
             <p:blipFill>
-              <a:blip r:embed="rId3"/>
+              <a:blip r:embed="rId4"/>
               <a:srcRect l="54980" t="72026" r="39565" b="21315"/>
               <a:stretch/>
             </p:blipFill>
@@ -3826,14 +3883,14 @@
           <p:nvPr>
             <p:extLst>
               <p:ext uri="{D42A27DB-BD31-4B8C-83A1-F6EECF244321}">
-                <p14:modId xmlns:p14="http://schemas.microsoft.com/office/powerpoint/2010/main" val="3251868384"/>
+                <p14:modId xmlns:p14="http://schemas.microsoft.com/office/powerpoint/2010/main" val="2239310672"/>
               </p:ext>
             </p:extLst>
           </p:nvPr>
         </p:nvGraphicFramePr>
         <p:xfrm>
           <a:off x="3678348" y="1422249"/>
-          <a:ext cx="4795974" cy="1828800"/>
+          <a:ext cx="4795974" cy="2438400"/>
         </p:xfrm>
         <a:graphic>
           <a:graphicData uri="http://schemas.openxmlformats.org/drawingml/2006/table">
@@ -3930,6 +3987,63 @@
                             </a:schemeClr>
                           </a:solidFill>
                         </a:rPr>
+                        <a:t>Subject Type</a:t>
+                      </a:r>
+                    </a:p>
+                  </a:txBody>
+                  <a:tcPr>
+                    <a:solidFill>
+                      <a:schemeClr val="bg1">
+                        <a:lumMod val="85000"/>
+                      </a:schemeClr>
+                    </a:solidFill>
+                  </a:tcPr>
+                </a:tc>
+                <a:tc>
+                  <a:txBody>
+                    <a:bodyPr/>
+                    <a:lstStyle/>
+                    <a:p>
+                      <a:r>
+                        <a:rPr lang="en-US" sz="1400" dirty="0">
+                          <a:solidFill>
+                            <a:schemeClr val="bg2">
+                              <a:lumMod val="25000"/>
+                            </a:schemeClr>
+                          </a:solidFill>
+                        </a:rPr>
+                        <a:t>[Chin or Human]</a:t>
+                      </a:r>
+                    </a:p>
+                  </a:txBody>
+                  <a:tcPr>
+                    <a:solidFill>
+                      <a:schemeClr val="bg1">
+                        <a:lumMod val="85000"/>
+                      </a:schemeClr>
+                    </a:solidFill>
+                  </a:tcPr>
+                </a:tc>
+                <a:extLst>
+                  <a:ext uri="{0D108BD9-81ED-4DB2-BD59-A6C34878D82A}">
+                    <a16:rowId xmlns:a16="http://schemas.microsoft.com/office/drawing/2014/main" val="3630156756"/>
+                  </a:ext>
+                </a:extLst>
+              </a:tr>
+              <a:tr h="277398">
+                <a:tc>
+                  <a:txBody>
+                    <a:bodyPr/>
+                    <a:lstStyle/>
+                    <a:p>
+                      <a:r>
+                        <a:rPr lang="en-US" sz="1400" dirty="0">
+                          <a:solidFill>
+                            <a:schemeClr val="bg2">
+                              <a:lumMod val="25000"/>
+                            </a:schemeClr>
+                          </a:solidFill>
+                        </a:rPr>
                         <a:t>Sound File Name</a:t>
                       </a:r>
                     </a:p>
@@ -3990,6 +4104,83 @@
                 <a:extLst>
                   <a:ext uri="{0D108BD9-81ED-4DB2-BD59-A6C34878D82A}">
                     <a16:rowId xmlns:a16="http://schemas.microsoft.com/office/drawing/2014/main" val="1306087800"/>
+                  </a:ext>
+                </a:extLst>
+              </a:tr>
+              <a:tr h="277398">
+                <a:tc>
+                  <a:txBody>
+                    <a:bodyPr/>
+                    <a:lstStyle/>
+                    <a:p>
+                      <a:r>
+                        <a:rPr lang="en-US" sz="1400" dirty="0">
+                          <a:solidFill>
+                            <a:schemeClr val="bg2">
+                              <a:lumMod val="25000"/>
+                            </a:schemeClr>
+                          </a:solidFill>
+                        </a:rPr>
+                        <a:t>Gain Scale</a:t>
+                      </a:r>
+                    </a:p>
+                  </a:txBody>
+                  <a:tcPr>
+                    <a:solidFill>
+                      <a:schemeClr val="bg1">
+                        <a:lumMod val="85000"/>
+                      </a:schemeClr>
+                    </a:solidFill>
+                  </a:tcPr>
+                </a:tc>
+                <a:tc>
+                  <a:txBody>
+                    <a:bodyPr/>
+                    <a:lstStyle/>
+                    <a:p>
+                      <a:r>
+                        <a:rPr lang="en-US" sz="1400" dirty="0">
+                          <a:solidFill>
+                            <a:schemeClr val="bg2">
+                              <a:lumMod val="25000"/>
+                            </a:schemeClr>
+                          </a:solidFill>
+                        </a:rPr>
+                        <a:t>[</a:t>
+                      </a:r>
+                      <a:r>
+                        <a:rPr lang="en-US" sz="1400" dirty="0" err="1">
+                          <a:solidFill>
+                            <a:schemeClr val="bg2">
+                              <a:lumMod val="25000"/>
+                            </a:schemeClr>
+                          </a:solidFill>
+                        </a:rPr>
+                        <a:t>metaDataScalar</a:t>
+                      </a:r>
+                      <a:r>
+                        <a:rPr lang="en-US" sz="1400" dirty="0">
+                          <a:solidFill>
+                            <a:schemeClr val="bg2">
+                              <a:lumMod val="25000"/>
+                            </a:schemeClr>
+                          </a:solidFill>
+                        </a:rPr>
+                        <a:t>]</a:t>
+                      </a:r>
+                    </a:p>
+                  </a:txBody>
+                  <a:tcPr>
+                    <a:solidFill>
+                      <a:schemeClr val="bg1">
+                        <a:lumMod val="85000"/>
+                      </a:schemeClr>
+                    </a:solidFill>
+                  </a:tcPr>
+                </a:tc>
+                <a:extLst>
+                  <a:ext uri="{0D108BD9-81ED-4DB2-BD59-A6C34878D82A}">
+                    <a16:rowId xmlns:a16="http://schemas.microsoft.com/office/drawing/2014/main" val="303658143"/>
                   </a:ext>
                 </a:extLst>
               </a:tr>
@@ -4315,6 +4506,11 @@
   <p:clrMapOvr>
     <a:masterClrMapping/>
   </p:clrMapOvr>
+  <p:extLst>
+    <p:ext uri="{6950BFC3-D8DA-4A85-94F7-54DA5524770B}">
+      <p188:commentRel xmlns:p188="http://schemas.microsoft.com/office/powerpoint/2018/8/main" r:id="rId2"/>
+    </p:ext>
+  </p:extLst>
 </p:sld>
 </file>
 
@@ -4584,7 +4780,10 @@
               <a:lstStyle/>
               <a:p>
                 <a:pPr algn="ctr"/>
-                <a:endParaRPr lang="en-US" dirty="0"/>
+                <a:r>
+                  <a:rPr lang="en-US" dirty="0"/>
+                  <a:t>c</a:t>
+                </a:r>
               </a:p>
             </p:txBody>
           </p:sp>
@@ -4678,74 +4877,20 @@
                     <a:ea typeface="+mn-ea"/>
                     <a:cs typeface="+mn-cs"/>
                   </a:rPr>
-                  <a:t>Title: “Swept DPOAE” </a:t>
+                  <a:t>Title: “MEMR” </a:t>
                 </a:r>
                 <a:endParaRPr lang="en-US" b="1" dirty="0"/>
               </a:p>
             </p:txBody>
           </p:sp>
-          <p:sp>
-            <p:nvSpPr>
-              <p:cNvPr id="22" name="Rectangle 21">
-                <a:extLst>
-                  <a:ext uri="{FF2B5EF4-FFF2-40B4-BE49-F238E27FC236}">
-                    <a16:creationId xmlns:a16="http://schemas.microsoft.com/office/drawing/2014/main" id="{40D183B3-1B53-FC95-AA75-79339CDC72AB}"/>
-                  </a:ext>
-                </a:extLst>
-              </p:cNvPr>
-              <p:cNvSpPr/>
-              <p:nvPr/>
-            </p:nvSpPr>
-            <p:spPr>
-              <a:xfrm>
-                <a:off x="6359256" y="3955038"/>
-                <a:ext cx="1473800" cy="457900"/>
-              </a:xfrm>
-              <a:prstGeom prst="rect">
-                <a:avLst/>
-              </a:prstGeom>
-              <a:solidFill>
-                <a:schemeClr val="bg1"/>
-              </a:solidFill>
-              <a:ln>
-                <a:solidFill>
-                  <a:schemeClr val="bg1"/>
-                </a:solidFill>
-              </a:ln>
-            </p:spPr>
-            <p:style>
-              <a:lnRef idx="2">
-                <a:schemeClr val="accent1">
-                  <a:shade val="15000"/>
-                </a:schemeClr>
-              </a:lnRef>
-              <a:fillRef idx="1">
-                <a:schemeClr val="accent1"/>
-              </a:fillRef>
-              <a:effectRef idx="0">
-                <a:schemeClr val="accent1"/>
-              </a:effectRef>
-              <a:fontRef idx="minor">
-                <a:schemeClr val="lt1"/>
-              </a:fontRef>
-            </p:style>
-            <p:txBody>
-              <a:bodyPr rtlCol="0" anchor="ctr"/>
-              <a:lstStyle/>
-              <a:p>
-                <a:pPr algn="ctr"/>
-                <a:endParaRPr lang="en-US"/>
-              </a:p>
-            </p:txBody>
-          </p:sp>
         </p:grpSp>
       </p:grpSp>
       <p:sp>
         <p:nvSpPr>
-          <p:cNvPr id="11" name="Flowchart: Terminator 10">
-            <a:extLst>
-              <a:ext uri="{FF2B5EF4-FFF2-40B4-BE49-F238E27FC236}">
-                <a16:creationId xmlns:a16="http://schemas.microsoft.com/office/drawing/2014/main" id="{A66E0D3A-CA70-AF7E-1BD1-2CC8FEA906BF}"/>
+          <p:cNvPr id="7" name="Rectangle: Rounded Corners 6">
+            <a:extLst>
+              <a:ext uri="{FF2B5EF4-FFF2-40B4-BE49-F238E27FC236}">
+                <a16:creationId xmlns:a16="http://schemas.microsoft.com/office/drawing/2014/main" id="{BADCF599-63B3-BF6B-3598-BF7EC630439D}"/>
               </a:ext>
             </a:extLst>
           </p:cNvPr>
@@ -4754,72 +4899,7 @@
         </p:nvSpPr>
         <p:spPr>
           <a:xfrm>
-            <a:off x="6825083" y="5856656"/>
-            <a:ext cx="1327450" cy="546260"/>
-          </a:xfrm>
-          <a:prstGeom prst="flowChartTerminator">
-            <a:avLst/>
-          </a:prstGeom>
-          <a:solidFill>
-            <a:schemeClr val="bg1">
-              <a:lumMod val="85000"/>
-            </a:schemeClr>
-          </a:solidFill>
-          <a:ln>
-            <a:noFill/>
-          </a:ln>
-          <a:effectLst>
-            <a:outerShdw blurRad="63500" sx="102000" sy="102000" algn="ctr" rotWithShape="0">
-              <a:prstClr val="black">
-                <a:alpha val="40000"/>
-              </a:prstClr>
-            </a:outerShdw>
-          </a:effectLst>
-        </p:spPr>
-        <p:style>
-          <a:lnRef idx="2">
-            <a:schemeClr val="accent1">
-              <a:shade val="15000"/>
-            </a:schemeClr>
-          </a:lnRef>
-          <a:fillRef idx="1">
-            <a:schemeClr val="accent1"/>
-          </a:fillRef>
-          <a:effectRef idx="0">
-            <a:schemeClr val="accent1"/>
-          </a:effectRef>
-          <a:fontRef idx="minor">
-            <a:schemeClr val="lt1"/>
-          </a:fontRef>
-        </p:style>
-        <p:txBody>
-          <a:bodyPr rtlCol="0" anchor="ctr"/>
-          <a:lstStyle/>
-          <a:p>
-            <a:pPr algn="ctr"/>
-            <a:r>
-              <a:rPr lang="en-US" sz="2400" dirty="0"/>
-              <a:t>Next</a:t>
-            </a:r>
-            <a:endParaRPr lang="en-US" dirty="0"/>
-          </a:p>
-        </p:txBody>
-      </p:sp>
-      <p:sp>
-        <p:nvSpPr>
-          <p:cNvPr id="7" name="Rectangle: Rounded Corners 6">
-            <a:extLst>
-              <a:ext uri="{FF2B5EF4-FFF2-40B4-BE49-F238E27FC236}">
-                <a16:creationId xmlns:a16="http://schemas.microsoft.com/office/drawing/2014/main" id="{BADCF599-63B3-BF6B-3598-BF7EC630439D}"/>
-              </a:ext>
-            </a:extLst>
-          </p:cNvPr>
-          <p:cNvSpPr/>
-          <p:nvPr/>
-        </p:nvSpPr>
-        <p:spPr>
-          <a:xfrm>
-            <a:off x="3678348" y="5065873"/>
+            <a:off x="3678348" y="3651136"/>
             <a:ext cx="4795974" cy="346332"/>
           </a:xfrm>
           <a:prstGeom prst="roundRect">
@@ -4866,7 +4946,7 @@
         </p:nvSpPr>
         <p:spPr>
           <a:xfrm>
-            <a:off x="3678348" y="5061494"/>
+            <a:off x="3678348" y="3646757"/>
             <a:ext cx="3818007" cy="346332"/>
           </a:xfrm>
           <a:prstGeom prst="roundRect">
@@ -4918,7 +4998,7 @@
         </p:nvSpPr>
         <p:spPr>
           <a:xfrm>
-            <a:off x="5551295" y="4759196"/>
+            <a:off x="5551295" y="3344459"/>
             <a:ext cx="1057405" cy="307777"/>
           </a:xfrm>
           <a:prstGeom prst="rect">
@@ -4953,7 +5033,7 @@
         </p:nvSpPr>
         <p:spPr>
           <a:xfrm>
-            <a:off x="4039468" y="5856656"/>
+            <a:off x="5412451" y="5796121"/>
             <a:ext cx="1327450" cy="546260"/>
           </a:xfrm>
           <a:prstGeom prst="flowChartTerminator">
@@ -5002,205 +5082,6 @@
           </a:p>
         </p:txBody>
       </p:sp>
-      <p:pic>
-        <p:nvPicPr>
-          <p:cNvPr id="17" name="Picture 16">
-            <a:extLst>
-              <a:ext uri="{FF2B5EF4-FFF2-40B4-BE49-F238E27FC236}">
-                <a16:creationId xmlns:a16="http://schemas.microsoft.com/office/drawing/2014/main" id="{896BA1FF-F271-64E6-68D6-A07375F18B62}"/>
-              </a:ext>
-            </a:extLst>
-          </p:cNvPr>
-          <p:cNvPicPr>
-            <a:picLocks noChangeAspect="1"/>
-          </p:cNvPicPr>
-          <p:nvPr/>
-        </p:nvPicPr>
-        <p:blipFill>
-          <a:blip r:embed="rId4">
-            <a:extLst>
-              <a:ext uri="{28A0092B-C50C-407E-A947-70E740481C1C}">
-                <a14:useLocalDpi xmlns:a14="http://schemas.microsoft.com/office/drawing/2010/main" val="0"/>
-              </a:ext>
-            </a:extLst>
-          </a:blip>
-          <a:srcRect l="575" t="21456" r="6284" b="447"/>
-          <a:stretch/>
-        </p:blipFill>
-        <p:spPr>
-          <a:xfrm>
-            <a:off x="4039468" y="1491716"/>
-            <a:ext cx="3957220" cy="2987416"/>
-          </a:xfrm>
-          <a:prstGeom prst="rect">
-            <a:avLst/>
-          </a:prstGeom>
-          <a:ln>
-            <a:solidFill>
-              <a:schemeClr val="tx1"/>
-            </a:solidFill>
-          </a:ln>
-        </p:spPr>
-      </p:pic>
-      <p:sp>
-        <p:nvSpPr>
-          <p:cNvPr id="13" name="Rectangle 12">
-            <a:extLst>
-              <a:ext uri="{FF2B5EF4-FFF2-40B4-BE49-F238E27FC236}">
-                <a16:creationId xmlns:a16="http://schemas.microsoft.com/office/drawing/2014/main" id="{2565031A-1428-14DC-3301-DAAEC6E27F92}"/>
-              </a:ext>
-            </a:extLst>
-          </p:cNvPr>
-          <p:cNvSpPr/>
-          <p:nvPr/>
-        </p:nvSpPr>
-        <p:spPr>
-          <a:xfrm>
-            <a:off x="6600074" y="1594980"/>
-            <a:ext cx="1196282" cy="640483"/>
-          </a:xfrm>
-          <a:prstGeom prst="rect">
-            <a:avLst/>
-          </a:prstGeom>
-          <a:solidFill>
-            <a:schemeClr val="bg1"/>
-          </a:solidFill>
-          <a:ln>
-            <a:solidFill>
-              <a:schemeClr val="bg1">
-                <a:lumMod val="75000"/>
-              </a:schemeClr>
-            </a:solidFill>
-          </a:ln>
-        </p:spPr>
-        <p:style>
-          <a:lnRef idx="2">
-            <a:schemeClr val="accent1">
-              <a:shade val="15000"/>
-            </a:schemeClr>
-          </a:lnRef>
-          <a:fillRef idx="1">
-            <a:schemeClr val="accent1"/>
-          </a:fillRef>
-          <a:effectRef idx="0">
-            <a:schemeClr val="accent1"/>
-          </a:effectRef>
-          <a:fontRef idx="minor">
-            <a:schemeClr val="lt1"/>
-          </a:fontRef>
-        </p:style>
-        <p:txBody>
-          <a:bodyPr rtlCol="0" anchor="ctr"/>
-          <a:lstStyle/>
-          <a:p>
-            <a:r>
-              <a:rPr lang="en-US" sz="900" b="1" dirty="0">
-                <a:solidFill>
-                  <a:srgbClr val="0070C0"/>
-                </a:solidFill>
-              </a:rPr>
-              <a:t>O          </a:t>
-            </a:r>
-            <a:r>
-              <a:rPr lang="en-US" sz="900" b="1" dirty="0">
-                <a:solidFill>
-                  <a:schemeClr val="tx1"/>
-                </a:solidFill>
-              </a:rPr>
-              <a:t>DPOAE</a:t>
-            </a:r>
-            <a:endParaRPr lang="en-US" sz="900" b="1" dirty="0">
-              <a:solidFill>
-                <a:srgbClr val="0070C0"/>
-              </a:solidFill>
-            </a:endParaRPr>
-          </a:p>
-          <a:p>
-            <a:endParaRPr lang="en-US" sz="900" dirty="0">
-              <a:solidFill>
-                <a:srgbClr val="0070C0"/>
-              </a:solidFill>
-            </a:endParaRPr>
-          </a:p>
-          <a:p>
-            <a:r>
-              <a:rPr lang="en-US" sz="900" b="1" dirty="0">
-                <a:solidFill>
-                  <a:srgbClr val="C00000"/>
-                </a:solidFill>
-              </a:rPr>
-              <a:t>X          </a:t>
-            </a:r>
-            <a:r>
-              <a:rPr lang="en-US" sz="900" b="1" dirty="0">
-                <a:solidFill>
-                  <a:schemeClr val="tx1"/>
-                </a:solidFill>
-              </a:rPr>
-              <a:t>NOISE</a:t>
-            </a:r>
-            <a:endParaRPr lang="en-US" sz="900" b="1" dirty="0">
-              <a:solidFill>
-                <a:srgbClr val="C00000"/>
-              </a:solidFill>
-            </a:endParaRPr>
-          </a:p>
-        </p:txBody>
-      </p:sp>
-      <p:sp>
-        <p:nvSpPr>
-          <p:cNvPr id="15" name="Rectangle 14">
-            <a:extLst>
-              <a:ext uri="{FF2B5EF4-FFF2-40B4-BE49-F238E27FC236}">
-                <a16:creationId xmlns:a16="http://schemas.microsoft.com/office/drawing/2014/main" id="{BC400713-2B34-C58C-7C3C-66C1693E2DA5}"/>
-              </a:ext>
-            </a:extLst>
-          </p:cNvPr>
-          <p:cNvSpPr/>
-          <p:nvPr/>
-        </p:nvSpPr>
-        <p:spPr>
-          <a:xfrm>
-            <a:off x="4095278" y="3252159"/>
-            <a:ext cx="189782" cy="854015"/>
-          </a:xfrm>
-          <a:prstGeom prst="rect">
-            <a:avLst/>
-          </a:prstGeom>
-          <a:solidFill>
-            <a:schemeClr val="bg1"/>
-          </a:solidFill>
-          <a:ln>
-            <a:solidFill>
-              <a:schemeClr val="bg1"/>
-            </a:solidFill>
-          </a:ln>
-        </p:spPr>
-        <p:style>
-          <a:lnRef idx="2">
-            <a:schemeClr val="accent1">
-              <a:shade val="15000"/>
-            </a:schemeClr>
-          </a:lnRef>
-          <a:fillRef idx="1">
-            <a:schemeClr val="accent1"/>
-          </a:fillRef>
-          <a:effectRef idx="0">
-            <a:schemeClr val="accent1"/>
-          </a:effectRef>
-          <a:fontRef idx="minor">
-            <a:schemeClr val="lt1"/>
-          </a:fontRef>
-        </p:style>
-        <p:txBody>
-          <a:bodyPr rtlCol="0" anchor="ctr"/>
-          <a:lstStyle/>
-          <a:p>
-            <a:pPr algn="ctr"/>
-            <a:endParaRPr lang="en-US"/>
-          </a:p>
-        </p:txBody>
-      </p:sp>
       <p:sp>
         <p:nvSpPr>
           <p:cNvPr id="24" name="Rectangle 23">
@@ -5255,367 +5136,6 @@
           </a:p>
         </p:txBody>
       </p:sp>
-      <p:pic>
-        <p:nvPicPr>
-          <p:cNvPr id="23" name="Picture 22">
-            <a:extLst>
-              <a:ext uri="{FF2B5EF4-FFF2-40B4-BE49-F238E27FC236}">
-                <a16:creationId xmlns:a16="http://schemas.microsoft.com/office/drawing/2014/main" id="{8361E361-0E6C-37E7-B2B8-5EA6CA751E99}"/>
-              </a:ext>
-            </a:extLst>
-          </p:cNvPr>
-          <p:cNvPicPr>
-            <a:picLocks noChangeAspect="1"/>
-          </p:cNvPicPr>
-          <p:nvPr/>
-        </p:nvPicPr>
-        <p:blipFill>
-          <a:blip r:embed="rId5"/>
-          <a:stretch>
-            <a:fillRect/>
-          </a:stretch>
-        </p:blipFill>
-        <p:spPr>
-          <a:xfrm>
-            <a:off x="4079202" y="2074887"/>
-            <a:ext cx="261668" cy="1626079"/>
-          </a:xfrm>
-          <a:prstGeom prst="rect">
-            <a:avLst/>
-          </a:prstGeom>
-        </p:spPr>
-      </p:pic>
-      <p:cxnSp>
-        <p:nvCxnSpPr>
-          <p:cNvPr id="27" name="Straight Connector 26">
-            <a:extLst>
-              <a:ext uri="{FF2B5EF4-FFF2-40B4-BE49-F238E27FC236}">
-                <a16:creationId xmlns:a16="http://schemas.microsoft.com/office/drawing/2014/main" id="{4CED889C-5D23-2D61-E3A7-E444720AB004}"/>
-              </a:ext>
-            </a:extLst>
-          </p:cNvPr>
-          <p:cNvCxnSpPr/>
-          <p:nvPr/>
-        </p:nvCxnSpPr>
-        <p:spPr>
-          <a:xfrm flipH="1">
-            <a:off x="6359097" y="4479132"/>
-            <a:ext cx="895718" cy="0"/>
-          </a:xfrm>
-          <a:prstGeom prst="line">
-            <a:avLst/>
-          </a:prstGeom>
-          <a:ln w="12700"/>
-        </p:spPr>
-        <p:style>
-          <a:lnRef idx="2">
-            <a:schemeClr val="dk1"/>
-          </a:lnRef>
-          <a:fillRef idx="0">
-            <a:schemeClr val="dk1"/>
-          </a:fillRef>
-          <a:effectRef idx="1">
-            <a:schemeClr val="dk1"/>
-          </a:effectRef>
-          <a:fontRef idx="minor">
-            <a:schemeClr val="tx1"/>
-          </a:fontRef>
-        </p:style>
-      </p:cxnSp>
-      <p:sp>
-        <p:nvSpPr>
-          <p:cNvPr id="29" name="Rectangle 28">
-            <a:extLst>
-              <a:ext uri="{FF2B5EF4-FFF2-40B4-BE49-F238E27FC236}">
-                <a16:creationId xmlns:a16="http://schemas.microsoft.com/office/drawing/2014/main" id="{74590467-BED6-E84D-8D50-960D991E4977}"/>
-              </a:ext>
-            </a:extLst>
-          </p:cNvPr>
-          <p:cNvSpPr/>
-          <p:nvPr/>
-        </p:nvSpPr>
-        <p:spPr>
-          <a:xfrm>
-            <a:off x="4364968" y="4123426"/>
-            <a:ext cx="3588590" cy="141512"/>
-          </a:xfrm>
-          <a:prstGeom prst="rect">
-            <a:avLst/>
-          </a:prstGeom>
-          <a:solidFill>
-            <a:schemeClr val="bg1"/>
-          </a:solidFill>
-          <a:ln>
-            <a:solidFill>
-              <a:schemeClr val="bg1"/>
-            </a:solidFill>
-          </a:ln>
-        </p:spPr>
-        <p:style>
-          <a:lnRef idx="2">
-            <a:schemeClr val="accent1">
-              <a:shade val="15000"/>
-            </a:schemeClr>
-          </a:lnRef>
-          <a:fillRef idx="1">
-            <a:schemeClr val="accent1"/>
-          </a:fillRef>
-          <a:effectRef idx="0">
-            <a:schemeClr val="accent1"/>
-          </a:effectRef>
-          <a:fontRef idx="minor">
-            <a:schemeClr val="lt1"/>
-          </a:fontRef>
-        </p:style>
-        <p:txBody>
-          <a:bodyPr rtlCol="0" anchor="ctr"/>
-          <a:lstStyle/>
-          <a:p>
-            <a:pPr algn="ctr"/>
-            <a:endParaRPr lang="en-US"/>
-          </a:p>
-        </p:txBody>
-      </p:sp>
-      <p:sp>
-        <p:nvSpPr>
-          <p:cNvPr id="28" name="TextBox 27">
-            <a:extLst>
-              <a:ext uri="{FF2B5EF4-FFF2-40B4-BE49-F238E27FC236}">
-                <a16:creationId xmlns:a16="http://schemas.microsoft.com/office/drawing/2014/main" id="{F7F157F4-28D8-2958-B2F2-49C6F4D5E7B8}"/>
-              </a:ext>
-            </a:extLst>
-          </p:cNvPr>
-          <p:cNvSpPr txBox="1"/>
-          <p:nvPr/>
-        </p:nvSpPr>
-        <p:spPr>
-          <a:xfrm>
-            <a:off x="4365599" y="4086718"/>
-            <a:ext cx="489922" cy="261610"/>
-          </a:xfrm>
-          <a:prstGeom prst="rect">
-            <a:avLst/>
-          </a:prstGeom>
-          <a:noFill/>
-        </p:spPr>
-        <p:txBody>
-          <a:bodyPr wrap="square" rtlCol="0">
-            <a:spAutoFit/>
-          </a:bodyPr>
-          <a:lstStyle/>
-          <a:p>
-            <a:r>
-              <a:rPr lang="en-US" sz="1100" dirty="0">
-                <a:latin typeface="+mj-lt"/>
-              </a:rPr>
-              <a:t>500</a:t>
-            </a:r>
-            <a:endParaRPr lang="en-US" sz="1050" dirty="0">
-              <a:latin typeface="+mj-lt"/>
-            </a:endParaRPr>
-          </a:p>
-        </p:txBody>
-      </p:sp>
-      <p:sp>
-        <p:nvSpPr>
-          <p:cNvPr id="30" name="TextBox 29">
-            <a:extLst>
-              <a:ext uri="{FF2B5EF4-FFF2-40B4-BE49-F238E27FC236}">
-                <a16:creationId xmlns:a16="http://schemas.microsoft.com/office/drawing/2014/main" id="{E009F830-5BEE-5093-48C6-73D6C67ECF9F}"/>
-              </a:ext>
-            </a:extLst>
-          </p:cNvPr>
-          <p:cNvSpPr txBox="1"/>
-          <p:nvPr/>
-        </p:nvSpPr>
-        <p:spPr>
-          <a:xfrm>
-            <a:off x="5063783" y="4061128"/>
-            <a:ext cx="348519" cy="261610"/>
-          </a:xfrm>
-          <a:prstGeom prst="rect">
-            <a:avLst/>
-          </a:prstGeom>
-          <a:noFill/>
-        </p:spPr>
-        <p:txBody>
-          <a:bodyPr wrap="square" rtlCol="0">
-            <a:spAutoFit/>
-          </a:bodyPr>
-          <a:lstStyle/>
-          <a:p>
-            <a:r>
-              <a:rPr lang="en-US" sz="1100" dirty="0">
-                <a:latin typeface="+mj-lt"/>
-              </a:rPr>
-              <a:t>1k</a:t>
-            </a:r>
-            <a:endParaRPr lang="en-US" sz="1050" dirty="0">
-              <a:latin typeface="+mj-lt"/>
-            </a:endParaRPr>
-          </a:p>
-        </p:txBody>
-      </p:sp>
-      <p:sp>
-        <p:nvSpPr>
-          <p:cNvPr id="31" name="TextBox 30">
-            <a:extLst>
-              <a:ext uri="{FF2B5EF4-FFF2-40B4-BE49-F238E27FC236}">
-                <a16:creationId xmlns:a16="http://schemas.microsoft.com/office/drawing/2014/main" id="{1E02A35B-CDC0-081F-4389-A6AB755922B3}"/>
-              </a:ext>
-            </a:extLst>
-          </p:cNvPr>
-          <p:cNvSpPr txBox="1"/>
-          <p:nvPr/>
-        </p:nvSpPr>
-        <p:spPr>
-          <a:xfrm>
-            <a:off x="5719581" y="4060249"/>
-            <a:ext cx="382006" cy="261610"/>
-          </a:xfrm>
-          <a:prstGeom prst="rect">
-            <a:avLst/>
-          </a:prstGeom>
-          <a:noFill/>
-        </p:spPr>
-        <p:txBody>
-          <a:bodyPr wrap="square" rtlCol="0">
-            <a:spAutoFit/>
-          </a:bodyPr>
-          <a:lstStyle/>
-          <a:p>
-            <a:r>
-              <a:rPr lang="en-US" sz="1100" dirty="0">
-                <a:latin typeface="+mj-lt"/>
-              </a:rPr>
-              <a:t>2k</a:t>
-            </a:r>
-            <a:endParaRPr lang="en-US" sz="1050" dirty="0">
-              <a:latin typeface="+mj-lt"/>
-            </a:endParaRPr>
-          </a:p>
-        </p:txBody>
-      </p:sp>
-      <p:sp>
-        <p:nvSpPr>
-          <p:cNvPr id="32" name="TextBox 31">
-            <a:extLst>
-              <a:ext uri="{FF2B5EF4-FFF2-40B4-BE49-F238E27FC236}">
-                <a16:creationId xmlns:a16="http://schemas.microsoft.com/office/drawing/2014/main" id="{F5068E25-AC7A-8F6B-3150-3FDA506ED7A1}"/>
-              </a:ext>
-            </a:extLst>
-          </p:cNvPr>
-          <p:cNvSpPr txBox="1"/>
-          <p:nvPr/>
-        </p:nvSpPr>
-        <p:spPr>
-          <a:xfrm>
-            <a:off x="6388315" y="4053135"/>
-            <a:ext cx="332693" cy="261610"/>
-          </a:xfrm>
-          <a:prstGeom prst="rect">
-            <a:avLst/>
-          </a:prstGeom>
-          <a:noFill/>
-        </p:spPr>
-        <p:txBody>
-          <a:bodyPr wrap="square" rtlCol="0">
-            <a:spAutoFit/>
-          </a:bodyPr>
-          <a:lstStyle/>
-          <a:p>
-            <a:r>
-              <a:rPr lang="en-US" sz="1100" dirty="0">
-                <a:latin typeface="+mj-lt"/>
-              </a:rPr>
-              <a:t>4k</a:t>
-            </a:r>
-            <a:endParaRPr lang="en-US" sz="1050" dirty="0">
-              <a:latin typeface="+mj-lt"/>
-            </a:endParaRPr>
-          </a:p>
-        </p:txBody>
-      </p:sp>
-      <p:sp>
-        <p:nvSpPr>
-          <p:cNvPr id="33" name="TextBox 32">
-            <a:extLst>
-              <a:ext uri="{FF2B5EF4-FFF2-40B4-BE49-F238E27FC236}">
-                <a16:creationId xmlns:a16="http://schemas.microsoft.com/office/drawing/2014/main" id="{8F5F8CDF-964A-629D-43BC-CAE9AF3B0564}"/>
-              </a:ext>
-            </a:extLst>
-          </p:cNvPr>
-          <p:cNvSpPr txBox="1"/>
-          <p:nvPr/>
-        </p:nvSpPr>
-        <p:spPr>
-          <a:xfrm>
-            <a:off x="7048672" y="4041732"/>
-            <a:ext cx="332693" cy="261610"/>
-          </a:xfrm>
-          <a:prstGeom prst="rect">
-            <a:avLst/>
-          </a:prstGeom>
-          <a:noFill/>
-        </p:spPr>
-        <p:txBody>
-          <a:bodyPr wrap="square" rtlCol="0">
-            <a:spAutoFit/>
-          </a:bodyPr>
-          <a:lstStyle/>
-          <a:p>
-            <a:r>
-              <a:rPr lang="en-US" sz="1100" dirty="0">
-                <a:latin typeface="+mj-lt"/>
-              </a:rPr>
-              <a:t>8k</a:t>
-            </a:r>
-            <a:endParaRPr lang="en-US" sz="1050" dirty="0">
-              <a:latin typeface="+mj-lt"/>
-            </a:endParaRPr>
-          </a:p>
-        </p:txBody>
-      </p:sp>
-      <p:sp>
-        <p:nvSpPr>
-          <p:cNvPr id="34" name="TextBox 33">
-            <a:extLst>
-              <a:ext uri="{FF2B5EF4-FFF2-40B4-BE49-F238E27FC236}">
-                <a16:creationId xmlns:a16="http://schemas.microsoft.com/office/drawing/2014/main" id="{A77E979E-FE15-9C62-9A29-D7FC14187514}"/>
-              </a:ext>
-            </a:extLst>
-          </p:cNvPr>
-          <p:cNvSpPr txBox="1"/>
-          <p:nvPr/>
-        </p:nvSpPr>
-        <p:spPr>
-          <a:xfrm>
-            <a:off x="7629461" y="4041732"/>
-            <a:ext cx="433971" cy="261610"/>
-          </a:xfrm>
-          <a:prstGeom prst="rect">
-            <a:avLst/>
-          </a:prstGeom>
-          <a:noFill/>
-        </p:spPr>
-        <p:txBody>
-          <a:bodyPr wrap="square" rtlCol="0">
-            <a:spAutoFit/>
-          </a:bodyPr>
-          <a:lstStyle/>
-          <a:p>
-            <a:r>
-              <a:rPr lang="en-US" sz="1100" dirty="0">
-                <a:latin typeface="+mj-lt"/>
-              </a:rPr>
-              <a:t>16k</a:t>
-            </a:r>
-            <a:endParaRPr lang="en-US" sz="1050" dirty="0">
-              <a:latin typeface="+mj-lt"/>
-            </a:endParaRPr>
-          </a:p>
-        </p:txBody>
-      </p:sp>
       <p:sp>
         <p:nvSpPr>
           <p:cNvPr id="18" name="Rectangle 17">
@@ -5664,10 +5184,10 @@
       </p:sp>
       <p:sp>
         <p:nvSpPr>
-          <p:cNvPr id="19" name="TextBox 18">
-            <a:extLst>
-              <a:ext uri="{FF2B5EF4-FFF2-40B4-BE49-F238E27FC236}">
-                <a16:creationId xmlns:a16="http://schemas.microsoft.com/office/drawing/2014/main" id="{9EC163EB-6A24-156D-1AEF-32E314BF12D5}"/>
+          <p:cNvPr id="20" name="TextBox 19">
+            <a:extLst>
+              <a:ext uri="{FF2B5EF4-FFF2-40B4-BE49-F238E27FC236}">
+                <a16:creationId xmlns:a16="http://schemas.microsoft.com/office/drawing/2014/main" id="{2D8883BB-A1AB-C6CB-C6DA-1BA4021FFC16}"/>
               </a:ext>
             </a:extLst>
           </p:cNvPr>
@@ -5676,8 +5196,8 @@
         </p:nvSpPr>
         <p:spPr>
           <a:xfrm>
-            <a:off x="5039419" y="4253209"/>
-            <a:ext cx="703911" cy="292388"/>
+            <a:off x="3678348" y="2504608"/>
+            <a:ext cx="1748877" cy="369332"/>
           </a:xfrm>
           <a:prstGeom prst="rect">
             <a:avLst/>
@@ -5691,10 +5211,62 @@
           <a:lstStyle/>
           <a:p>
             <a:r>
-              <a:rPr lang="en-US" sz="1300" dirty="0">
-                <a:latin typeface="+mj-lt"/>
-              </a:rPr>
-              <a:t>DPOAE</a:t>
+              <a:rPr lang="en-US" dirty="0"/>
+              <a:t>Trials Complete</a:t>
+            </a:r>
+          </a:p>
+        </p:txBody>
+      </p:sp>
+      <p:sp>
+        <p:nvSpPr>
+          <p:cNvPr id="21" name="Rectangle 20">
+            <a:extLst>
+              <a:ext uri="{FF2B5EF4-FFF2-40B4-BE49-F238E27FC236}">
+                <a16:creationId xmlns:a16="http://schemas.microsoft.com/office/drawing/2014/main" id="{68D66886-22CB-9E1C-D6C7-4949D6DFF139}"/>
+              </a:ext>
+            </a:extLst>
+          </p:cNvPr>
+          <p:cNvSpPr/>
+          <p:nvPr/>
+        </p:nvSpPr>
+        <p:spPr>
+          <a:xfrm>
+            <a:off x="7538401" y="2512411"/>
+            <a:ext cx="830313" cy="378261"/>
+          </a:xfrm>
+          <a:prstGeom prst="rect">
+            <a:avLst/>
+          </a:prstGeom>
+          <a:solidFill>
+            <a:schemeClr val="bg1">
+              <a:lumMod val="85000"/>
+            </a:schemeClr>
+          </a:solidFill>
+        </p:spPr>
+        <p:style>
+          <a:lnRef idx="2">
+            <a:schemeClr val="accent1">
+              <a:shade val="15000"/>
+            </a:schemeClr>
+          </a:lnRef>
+          <a:fillRef idx="1">
+            <a:schemeClr val="accent1"/>
+          </a:fillRef>
+          <a:effectRef idx="0">
+            <a:schemeClr val="accent1"/>
+          </a:effectRef>
+          <a:fontRef idx="minor">
+            <a:schemeClr val="lt1"/>
+          </a:fontRef>
+        </p:style>
+        <p:txBody>
+          <a:bodyPr rtlCol="0" anchor="ctr"/>
+          <a:lstStyle/>
+          <a:p>
+            <a:pPr algn="ctr"/>
+            <a:r>
+              <a:rPr lang="en-US" dirty="0"/>
+              <a:t>5</a:t>
             </a:r>
           </a:p>
         </p:txBody>
@@ -5964,7 +5536,7 @@
               <a:lstStyle/>
               <a:p>
                 <a:pPr algn="ctr"/>
-                <a:endParaRPr lang="en-US"/>
+                <a:endParaRPr lang="en-US" dirty="0"/>
               </a:p>
             </p:txBody>
           </p:sp>
@@ -6010,7 +5582,7 @@
                     <a:ea typeface="+mn-ea"/>
                     <a:cs typeface="+mn-cs"/>
                   </a:rPr>
-                  <a:t>Results: Swept DPOAE</a:t>
+                  <a:t>Results: MEMR</a:t>
                 </a:r>
                 <a:endParaRPr lang="en-US" b="1" dirty="0"/>
               </a:p>
@@ -6072,44 +5644,6 @@
           </p:sp>
         </p:grpSp>
       </p:grpSp>
-      <p:pic>
-        <p:nvPicPr>
-          <p:cNvPr id="5" name="Picture 4">
-            <a:extLst>
-              <a:ext uri="{FF2B5EF4-FFF2-40B4-BE49-F238E27FC236}">
-                <a16:creationId xmlns:a16="http://schemas.microsoft.com/office/drawing/2014/main" id="{9F20DB1F-0429-8814-0076-D4DFA9DF3188}"/>
-              </a:ext>
-            </a:extLst>
-          </p:cNvPr>
-          <p:cNvPicPr>
-            <a:picLocks noChangeAspect="1"/>
-          </p:cNvPicPr>
-          <p:nvPr/>
-        </p:nvPicPr>
-        <p:blipFill>
-          <a:blip r:embed="rId4">
-            <a:extLst>
-              <a:ext uri="{28A0092B-C50C-407E-A947-70E740481C1C}">
-                <a14:useLocalDpi xmlns:a14="http://schemas.microsoft.com/office/drawing/2010/main" val="0"/>
-              </a:ext>
-            </a:extLst>
-          </a:blip>
-          <a:srcRect l="1826" t="21695" r="6766" b="454"/>
-          <a:stretch/>
-        </p:blipFill>
-        <p:spPr>
-          <a:xfrm>
-            <a:off x="3706766" y="1502943"/>
-            <a:ext cx="4670997" cy="3581820"/>
-          </a:xfrm>
-          <a:prstGeom prst="rect">
-            <a:avLst/>
-          </a:prstGeom>
-          <a:ln>
-            <a:noFill/>
-          </a:ln>
-        </p:spPr>
-      </p:pic>
       <p:sp>
         <p:nvSpPr>
           <p:cNvPr id="17" name="Flowchart: Terminator 16">
@@ -6170,6 +5704,41 @@
               <a:t>Finish</a:t>
             </a:r>
             <a:endParaRPr lang="en-US" dirty="0"/>
+          </a:p>
+        </p:txBody>
+      </p:sp>
+      <p:sp>
+        <p:nvSpPr>
+          <p:cNvPr id="2" name="TextBox 1">
+            <a:extLst>
+              <a:ext uri="{FF2B5EF4-FFF2-40B4-BE49-F238E27FC236}">
+                <a16:creationId xmlns:a16="http://schemas.microsoft.com/office/drawing/2014/main" id="{CB579A1A-087F-7C15-6FEF-3CBCF6DF27FA}"/>
+              </a:ext>
+            </a:extLst>
+          </p:cNvPr>
+          <p:cNvSpPr txBox="1"/>
+          <p:nvPr/>
+        </p:nvSpPr>
+        <p:spPr>
+          <a:xfrm>
+            <a:off x="4127630" y="2947744"/>
+            <a:ext cx="3897092" cy="369332"/>
+          </a:xfrm>
+          <a:prstGeom prst="rect">
+            <a:avLst/>
+          </a:prstGeom>
+          <a:noFill/>
+        </p:spPr>
+        <p:txBody>
+          <a:bodyPr wrap="none" rtlCol="0">
+            <a:spAutoFit/>
+          </a:bodyPr>
+          <a:lstStyle/>
+          <a:p>
+            <a:r>
+              <a:rPr lang="en-US" dirty="0"/>
+              <a:t>Exam Complete. Press Finish to Save.</a:t>
+            </a:r>
           </a:p>
         </p:txBody>
       </p:sp>

--- a/Specifications/middle-ear-muscle-reflex/GUI-Screens.pptx
+++ b/Specifications/middle-ear-muscle-reflex/GUI-Screens.pptx
@@ -318,7 +318,7 @@
           <a:p>
             <a:fld id="{6E783203-F72E-42D3-9F56-E7123AD26E23}" type="datetimeFigureOut">
               <a:rPr lang="en-US" smtClean="0"/>
-              <a:t>7/3/2025</a:t>
+              <a:t>7/7/2025</a:t>
             </a:fld>
             <a:endParaRPr lang="en-US"/>
           </a:p>
@@ -516,7 +516,7 @@
           <a:p>
             <a:fld id="{6E783203-F72E-42D3-9F56-E7123AD26E23}" type="datetimeFigureOut">
               <a:rPr lang="en-US" smtClean="0"/>
-              <a:t>7/3/2025</a:t>
+              <a:t>7/7/2025</a:t>
             </a:fld>
             <a:endParaRPr lang="en-US"/>
           </a:p>
@@ -724,7 +724,7 @@
           <a:p>
             <a:fld id="{6E783203-F72E-42D3-9F56-E7123AD26E23}" type="datetimeFigureOut">
               <a:rPr lang="en-US" smtClean="0"/>
-              <a:t>7/3/2025</a:t>
+              <a:t>7/7/2025</a:t>
             </a:fld>
             <a:endParaRPr lang="en-US"/>
           </a:p>
@@ -922,7 +922,7 @@
           <a:p>
             <a:fld id="{6E783203-F72E-42D3-9F56-E7123AD26E23}" type="datetimeFigureOut">
               <a:rPr lang="en-US" smtClean="0"/>
-              <a:t>7/3/2025</a:t>
+              <a:t>7/7/2025</a:t>
             </a:fld>
             <a:endParaRPr lang="en-US"/>
           </a:p>
@@ -1197,7 +1197,7 @@
           <a:p>
             <a:fld id="{6E783203-F72E-42D3-9F56-E7123AD26E23}" type="datetimeFigureOut">
               <a:rPr lang="en-US" smtClean="0"/>
-              <a:t>7/3/2025</a:t>
+              <a:t>7/7/2025</a:t>
             </a:fld>
             <a:endParaRPr lang="en-US"/>
           </a:p>
@@ -1462,7 +1462,7 @@
           <a:p>
             <a:fld id="{6E783203-F72E-42D3-9F56-E7123AD26E23}" type="datetimeFigureOut">
               <a:rPr lang="en-US" smtClean="0"/>
-              <a:t>7/3/2025</a:t>
+              <a:t>7/7/2025</a:t>
             </a:fld>
             <a:endParaRPr lang="en-US"/>
           </a:p>
@@ -1874,7 +1874,7 @@
           <a:p>
             <a:fld id="{6E783203-F72E-42D3-9F56-E7123AD26E23}" type="datetimeFigureOut">
               <a:rPr lang="en-US" smtClean="0"/>
-              <a:t>7/3/2025</a:t>
+              <a:t>7/7/2025</a:t>
             </a:fld>
             <a:endParaRPr lang="en-US"/>
           </a:p>
@@ -2015,7 +2015,7 @@
           <a:p>
             <a:fld id="{6E783203-F72E-42D3-9F56-E7123AD26E23}" type="datetimeFigureOut">
               <a:rPr lang="en-US" smtClean="0"/>
-              <a:t>7/3/2025</a:t>
+              <a:t>7/7/2025</a:t>
             </a:fld>
             <a:endParaRPr lang="en-US"/>
           </a:p>
@@ -2128,7 +2128,7 @@
           <a:p>
             <a:fld id="{6E783203-F72E-42D3-9F56-E7123AD26E23}" type="datetimeFigureOut">
               <a:rPr lang="en-US" smtClean="0"/>
-              <a:t>7/3/2025</a:t>
+              <a:t>7/7/2025</a:t>
             </a:fld>
             <a:endParaRPr lang="en-US"/>
           </a:p>
@@ -2439,7 +2439,7 @@
           <a:p>
             <a:fld id="{6E783203-F72E-42D3-9F56-E7123AD26E23}" type="datetimeFigureOut">
               <a:rPr lang="en-US" smtClean="0"/>
-              <a:t>7/3/2025</a:t>
+              <a:t>7/7/2025</a:t>
             </a:fld>
             <a:endParaRPr lang="en-US"/>
           </a:p>
@@ -2727,7 +2727,7 @@
           <a:p>
             <a:fld id="{6E783203-F72E-42D3-9F56-E7123AD26E23}" type="datetimeFigureOut">
               <a:rPr lang="en-US" smtClean="0"/>
-              <a:t>7/3/2025</a:t>
+              <a:t>7/7/2025</a:t>
             </a:fld>
             <a:endParaRPr lang="en-US"/>
           </a:p>
@@ -2968,7 +2968,7 @@
           <a:p>
             <a:fld id="{6E783203-F72E-42D3-9F56-E7123AD26E23}" type="datetimeFigureOut">
               <a:rPr lang="en-US" smtClean="0"/>
-              <a:t>7/3/2025</a:t>
+              <a:t>7/7/2025</a:t>
             </a:fld>
             <a:endParaRPr lang="en-US"/>
           </a:p>

--- a/Specifications/middle-ear-muscle-reflex/GUI-Screens.pptx
+++ b/Specifications/middle-ear-muscle-reflex/GUI-Screens.pptx
@@ -122,7 +122,7 @@
 
 <file path=ppt/comments/modernComment_105_B1C5B056.xml><?xml version="1.0" encoding="utf-8"?>
 <p188:cmLst xmlns:a="http://schemas.openxmlformats.org/drawingml/2006/main" xmlns:r="http://schemas.openxmlformats.org/officeDocument/2006/relationships" xmlns:p188="http://schemas.microsoft.com/office/powerpoint/2018/8/main">
-  <p188:cm id="{3C806639-315B-4B31-9216-2810E251B41B}" authorId="{88F12675-B476-9C9C-3DDC-B9414340EA78}" created="2025-07-03T20:03:05.060">
+  <p188:cm id="{3C806639-315B-4B31-9216-2810E251B41B}" authorId="{88F12675-B476-9C9C-3DDC-B9414340EA78}" status="resolved" created="2025-07-03T20:03:05.060" complete="100000">
     <ac:txMkLst xmlns:ac="http://schemas.microsoft.com/office/drawing/2013/main/command">
       <pc:docMk xmlns:pc="http://schemas.microsoft.com/office/powerpoint/2013/main/command"/>
       <pc:sldMk xmlns:pc="http://schemas.microsoft.com/office/powerpoint/2013/main/command" cId="2982522966" sldId="261"/>
@@ -145,7 +145,7 @@
       </a:p>
     </p188:txBody>
   </p188:cm>
-  <p188:cm id="{2E8008AD-E049-463C-83ED-80FA3C36DB52}" authorId="{88F12675-B476-9C9C-3DDC-B9414340EA78}" created="2025-07-03T20:33:20.389">
+  <p188:cm id="{2E8008AD-E049-463C-83ED-80FA3C36DB52}" authorId="{88F12675-B476-9C9C-3DDC-B9414340EA78}" status="resolved" created="2025-07-03T20:33:20.389" complete="100000">
     <ac:txMkLst xmlns:ac="http://schemas.microsoft.com/office/drawing/2013/main/command">
       <pc:docMk xmlns:pc="http://schemas.microsoft.com/office/powerpoint/2013/main/command"/>
       <pc:sldMk xmlns:pc="http://schemas.microsoft.com/office/powerpoint/2013/main/command" cId="2982522966" sldId="261"/>
@@ -3883,14 +3883,14 @@
           <p:nvPr>
             <p:extLst>
               <p:ext uri="{D42A27DB-BD31-4B8C-83A1-F6EECF244321}">
-                <p14:modId xmlns:p14="http://schemas.microsoft.com/office/powerpoint/2010/main" val="2239310672"/>
+                <p14:modId xmlns:p14="http://schemas.microsoft.com/office/powerpoint/2010/main" val="2162889528"/>
               </p:ext>
             </p:extLst>
           </p:nvPr>
         </p:nvGraphicFramePr>
         <p:xfrm>
           <a:off x="3678348" y="1422249"/>
-          <a:ext cx="4795974" cy="2438400"/>
+          <a:ext cx="4795974" cy="3657600"/>
         </p:xfrm>
         <a:graphic>
           <a:graphicData uri="http://schemas.openxmlformats.org/drawingml/2006/table">
@@ -4044,7 +4044,7 @@
                             </a:schemeClr>
                           </a:solidFill>
                         </a:rPr>
-                        <a:t>Sound File Name</a:t>
+                        <a:t>Sound Files Folder</a:t>
                       </a:r>
                     </a:p>
                   </a:txBody>
@@ -4233,7 +4233,7 @@
                             </a:schemeClr>
                           </a:solidFill>
                         </a:rPr>
-                        <a:t>NumTrials</a:t>
+                        <a:t>NumRepeats</a:t>
                       </a:r>
                       <a:r>
                         <a:rPr lang="en-US" sz="1400" dirty="0">
@@ -4429,6 +4429,83 @@
                             </a:schemeClr>
                           </a:solidFill>
                         </a:rPr>
+                        <a:t>Results File Folder</a:t>
+                      </a:r>
+                    </a:p>
+                  </a:txBody>
+                  <a:tcPr>
+                    <a:solidFill>
+                      <a:schemeClr val="bg1">
+                        <a:lumMod val="85000"/>
+                      </a:schemeClr>
+                    </a:solidFill>
+                  </a:tcPr>
+                </a:tc>
+                <a:tc>
+                  <a:txBody>
+                    <a:bodyPr/>
+                    <a:lstStyle/>
+                    <a:p>
+                      <a:r>
+                        <a:rPr lang="en-US" sz="1400" dirty="0">
+                          <a:solidFill>
+                            <a:schemeClr val="bg2">
+                              <a:lumMod val="25000"/>
+                            </a:schemeClr>
+                          </a:solidFill>
+                        </a:rPr>
+                        <a:t>[</a:t>
+                      </a:r>
+                      <a:r>
+                        <a:rPr lang="en-US" sz="1400" dirty="0" err="1">
+                          <a:solidFill>
+                            <a:schemeClr val="bg2">
+                              <a:lumMod val="25000"/>
+                            </a:schemeClr>
+                          </a:solidFill>
+                        </a:rPr>
+                        <a:t>RecordFileFolder</a:t>
+                      </a:r>
+                      <a:r>
+                        <a:rPr lang="en-US" sz="1400" dirty="0">
+                          <a:solidFill>
+                            <a:schemeClr val="bg2">
+                              <a:lumMod val="25000"/>
+                            </a:schemeClr>
+                          </a:solidFill>
+                        </a:rPr>
+                        <a:t>]</a:t>
+                      </a:r>
+                    </a:p>
+                  </a:txBody>
+                  <a:tcPr>
+                    <a:solidFill>
+                      <a:schemeClr val="bg1">
+                        <a:lumMod val="85000"/>
+                      </a:schemeClr>
+                    </a:solidFill>
+                  </a:tcPr>
+                </a:tc>
+                <a:extLst>
+                  <a:ext uri="{0D108BD9-81ED-4DB2-BD59-A6C34878D82A}">
+                    <a16:rowId xmlns:a16="http://schemas.microsoft.com/office/drawing/2014/main" val="328923842"/>
+                  </a:ext>
+                </a:extLst>
+              </a:tr>
+              <a:tr h="281251">
+                <a:tc>
+                  <a:txBody>
+                    <a:bodyPr/>
+                    <a:lstStyle/>
+                    <a:p>
+                      <a:r>
+                        <a:rPr lang="en-US" sz="1400" dirty="0">
+                          <a:solidFill>
+                            <a:schemeClr val="bg2">
+                              <a:lumMod val="25000"/>
+                            </a:schemeClr>
+                          </a:solidFill>
+                        </a:rPr>
                         <a:t>Results File Name</a:t>
                       </a:r>
                     </a:p>
@@ -4488,7 +4565,198 @@
                 </a:tc>
                 <a:extLst>
                   <a:ext uri="{0D108BD9-81ED-4DB2-BD59-A6C34878D82A}">
-                    <a16:rowId xmlns:a16="http://schemas.microsoft.com/office/drawing/2014/main" val="328923842"/>
+                    <a16:rowId xmlns:a16="http://schemas.microsoft.com/office/drawing/2014/main" val="2374301036"/>
+                  </a:ext>
+                </a:extLst>
+              </a:tr>
+              <a:tr h="281251">
+                <a:tc>
+                  <a:txBody>
+                    <a:bodyPr/>
+                    <a:lstStyle/>
+                    <a:p>
+                      <a:r>
+                        <a:rPr lang="en-US" sz="1400" dirty="0">
+                          <a:solidFill>
+                            <a:schemeClr val="bg2">
+                              <a:lumMod val="25000"/>
+                            </a:schemeClr>
+                          </a:solidFill>
+                        </a:rPr>
+                        <a:t>Speaker Output Channel</a:t>
+                      </a:r>
+                    </a:p>
+                  </a:txBody>
+                  <a:tcPr>
+                    <a:solidFill>
+                      <a:schemeClr val="bg1">
+                        <a:lumMod val="85000"/>
+                      </a:schemeClr>
+                    </a:solidFill>
+                  </a:tcPr>
+                </a:tc>
+                <a:tc>
+                  <a:txBody>
+                    <a:bodyPr/>
+                    <a:lstStyle/>
+                    <a:p>
+                      <a:r>
+                        <a:rPr lang="en-US" sz="1400" dirty="0">
+                          <a:solidFill>
+                            <a:schemeClr val="bg2">
+                              <a:lumMod val="25000"/>
+                            </a:schemeClr>
+                          </a:solidFill>
+                        </a:rPr>
+                        <a:t>[?]</a:t>
+                      </a:r>
+                    </a:p>
+                  </a:txBody>
+                  <a:tcPr>
+                    <a:solidFill>
+                      <a:schemeClr val="bg1">
+                        <a:lumMod val="85000"/>
+                      </a:schemeClr>
+                    </a:solidFill>
+                  </a:tcPr>
+                </a:tc>
+                <a:extLst>
+                  <a:ext uri="{0D108BD9-81ED-4DB2-BD59-A6C34878D82A}">
+                    <a16:rowId xmlns:a16="http://schemas.microsoft.com/office/drawing/2014/main" val="3561210944"/>
+                  </a:ext>
+                </a:extLst>
+              </a:tr>
+              <a:tr h="281251">
+                <a:tc>
+                  <a:txBody>
+                    <a:bodyPr/>
+                    <a:lstStyle/>
+                    <a:p>
+                      <a:r>
+                        <a:rPr lang="en-US" sz="1400" dirty="0">
+                          <a:solidFill>
+                            <a:schemeClr val="bg2">
+                              <a:lumMod val="25000"/>
+                            </a:schemeClr>
+                          </a:solidFill>
+                        </a:rPr>
+                        <a:t>Probe Stimulus Level</a:t>
+                      </a:r>
+                    </a:p>
+                  </a:txBody>
+                  <a:tcPr>
+                    <a:solidFill>
+                      <a:schemeClr val="bg1">
+                        <a:lumMod val="85000"/>
+                      </a:schemeClr>
+                    </a:solidFill>
+                  </a:tcPr>
+                </a:tc>
+                <a:tc>
+                  <a:txBody>
+                    <a:bodyPr/>
+                    <a:lstStyle/>
+                    <a:p>
+                      <a:r>
+                        <a:rPr lang="en-US" sz="1400" dirty="0">
+                          <a:solidFill>
+                            <a:schemeClr val="bg2">
+                              <a:lumMod val="25000"/>
+                            </a:schemeClr>
+                          </a:solidFill>
+                        </a:rPr>
+                        <a:t>[?]</a:t>
+                      </a:r>
+                    </a:p>
+                  </a:txBody>
+                  <a:tcPr>
+                    <a:solidFill>
+                      <a:schemeClr val="bg1">
+                        <a:lumMod val="85000"/>
+                      </a:schemeClr>
+                    </a:solidFill>
+                  </a:tcPr>
+                </a:tc>
+                <a:extLst>
+                  <a:ext uri="{0D108BD9-81ED-4DB2-BD59-A6C34878D82A}">
+                    <a16:rowId xmlns:a16="http://schemas.microsoft.com/office/drawing/2014/main" val="3281284511"/>
+                  </a:ext>
+                </a:extLst>
+              </a:tr>
+              <a:tr h="281251">
+                <a:tc>
+                  <a:txBody>
+                    <a:bodyPr/>
+                    <a:lstStyle/>
+                    <a:p>
+                      <a:r>
+                        <a:rPr lang="en-US" sz="1400" dirty="0">
+                          <a:solidFill>
+                            <a:schemeClr val="bg2">
+                              <a:lumMod val="25000"/>
+                            </a:schemeClr>
+                          </a:solidFill>
+                        </a:rPr>
+                        <a:t>Elicitor Level Array</a:t>
+                      </a:r>
+                    </a:p>
+                  </a:txBody>
+                  <a:tcPr>
+                    <a:solidFill>
+                      <a:schemeClr val="bg1">
+                        <a:lumMod val="85000"/>
+                      </a:schemeClr>
+                    </a:solidFill>
+                  </a:tcPr>
+                </a:tc>
+                <a:tc>
+                  <a:txBody>
+                    <a:bodyPr/>
+                    <a:lstStyle/>
+                    <a:p>
+                      <a:r>
+                        <a:rPr lang="en-US" sz="1400" dirty="0">
+                          <a:solidFill>
+                            <a:schemeClr val="bg2">
+                              <a:lumMod val="25000"/>
+                            </a:schemeClr>
+                          </a:solidFill>
+                        </a:rPr>
+                        <a:t>[</a:t>
+                      </a:r>
+                      <a:r>
+                        <a:rPr lang="en-US" sz="1400" dirty="0" err="1">
+                          <a:solidFill>
+                            <a:schemeClr val="bg2">
+                              <a:lumMod val="25000"/>
+                            </a:schemeClr>
+                          </a:solidFill>
+                        </a:rPr>
+                        <a:t>Level_dBSPL</a:t>
+                      </a:r>
+                      <a:r>
+                        <a:rPr lang="en-US" sz="1400" dirty="0">
+                          <a:solidFill>
+                            <a:schemeClr val="bg2">
+                              <a:lumMod val="25000"/>
+                            </a:schemeClr>
+                          </a:solidFill>
+                        </a:rPr>
+                        <a:t>]</a:t>
+                      </a:r>
+                    </a:p>
+                  </a:txBody>
+                  <a:tcPr>
+                    <a:solidFill>
+                      <a:schemeClr val="bg1">
+                        <a:lumMod val="85000"/>
+                      </a:schemeClr>
+                    </a:solidFill>
+                  </a:tcPr>
+                </a:tc>
+                <a:extLst>
+                  <a:ext uri="{0D108BD9-81ED-4DB2-BD59-A6C34878D82A}">
+                    <a16:rowId xmlns:a16="http://schemas.microsoft.com/office/drawing/2014/main" val="1919372354"/>
                   </a:ext>
                 </a:extLst>
               </a:tr>
@@ -5197,7 +5465,7 @@
         <p:spPr>
           <a:xfrm>
             <a:off x="3678348" y="2504608"/>
-            <a:ext cx="1748877" cy="369332"/>
+            <a:ext cx="1890774" cy="369332"/>
           </a:xfrm>
           <a:prstGeom prst="rect">
             <a:avLst/>
@@ -5212,7 +5480,7 @@
           <a:p>
             <a:r>
               <a:rPr lang="en-US" dirty="0"/>
-              <a:t>Trials Complete</a:t>
+              <a:t>Blocks Complete</a:t>
             </a:r>
           </a:p>
         </p:txBody>
